--- a/Хакатон_Кибермыши (2).pptx
+++ b/Хакатон_Кибермыши (2).pptx
@@ -1243,7 +1243,7 @@
           <a:p>
             <a:fld id="{5E05B635-9270-417F-827D-8D92C1338443}" type="datetimeFigureOut">
               <a:rPr lang="ru-RU" smtClean="0"/>
-              <a:t>29.09.2026</a:t>
+              <a:t>30.09.2026</a:t>
             </a:fld>
             <a:endParaRPr lang="ru-RU"/>
           </a:p>
@@ -1641,7 +1641,7 @@
         <p:spPr bwMode="auto">
           <a:xfrm>
             <a:off x="388620" y="544141"/>
-            <a:ext cx="1348740" cy="523220"/>
+            <a:ext cx="1667444" cy="523220"/>
           </a:xfrm>
           <a:prstGeom prst="rect">
             <a:avLst/>
@@ -1689,21 +1689,13 @@
           </a:bodyPr>
           <a:lstStyle/>
           <a:p>
-            <a:pPr marL="0" marR="0" lvl="0" indent="0" algn="l" defTabSz="914400" rtl="0" eaLnBrk="0" fontAlgn="base" latinLnBrk="0" hangingPunct="0">
-              <a:lnSpc>
-                <a:spcPct val="100000"/>
-              </a:lnSpc>
+            <a:pPr lvl="0" eaLnBrk="0" fontAlgn="base" hangingPunct="0">
               <a:spcBef>
                 <a:spcPct val="0"/>
               </a:spcBef>
               <a:spcAft>
                 <a:spcPct val="0"/>
               </a:spcAft>
-              <a:buClrTx/>
-              <a:buSzTx/>
-              <a:buFontTx/>
-              <a:buNone/>
-              <a:tabLst/>
             </a:pPr>
             <a:r>
               <a:rPr kumimoji="0" lang="ru-RU" altLang="ru-RU" sz="1800" b="1" i="0" u="none" strike="noStrike" cap="none" normalizeH="0" baseline="0" dirty="0">
@@ -1735,34 +1727,16 @@
               </a:rPr>
             </a:br>
             <a:r>
-              <a:rPr kumimoji="0" lang="ru-RU" altLang="ru-RU" sz="1000" b="0" i="0" u="none" strike="noStrike" cap="none" normalizeH="0" baseline="0" dirty="0">
-                <a:ln>
-                  <a:noFill/>
-                </a:ln>
-                <a:solidFill>
-                  <a:srgbClr val="0A1650"/>
-                </a:solidFill>
-                <a:effectLst/>
-                <a:latin typeface="Inter Medium" panose="02000603000000020004" pitchFamily="50" charset="0"/>
-                <a:ea typeface="Inter Medium" panose="02000603000000020004" pitchFamily="50" charset="0"/>
-                <a:cs typeface="Inter Medium" panose="02000603000000020004" pitchFamily="50" charset="0"/>
-              </a:rPr>
-              <a:t>ссылка на бота</a:t>
-            </a:r>
-            <a:r>
-              <a:rPr kumimoji="0" lang="ru-RU" altLang="ru-RU" sz="600" b="0" i="0" u="none" strike="noStrike" cap="none" normalizeH="0" baseline="0" dirty="0">
-                <a:ln>
-                  <a:noFill/>
-                </a:ln>
-                <a:solidFill>
-                  <a:srgbClr val="0A1650"/>
-                </a:solidFill>
-                <a:effectLst/>
-                <a:latin typeface="Inter Medium" panose="02000603000000020004" pitchFamily="50" charset="0"/>
-                <a:ea typeface="Inter Medium" panose="02000603000000020004" pitchFamily="50" charset="0"/>
-                <a:cs typeface="Inter Medium" panose="02000603000000020004" pitchFamily="50" charset="0"/>
-              </a:rPr>
-              <a:t> </a:t>
+              <a:rPr lang="ru-RU" altLang="ru-RU" sz="1000" dirty="0">
+                <a:solidFill>
+                  <a:srgbClr val="0A1650"/>
+                </a:solidFill>
+                <a:latin typeface="Inter Medium" panose="02000603000000020004" pitchFamily="50" charset="0"/>
+                <a:ea typeface="Inter Medium" panose="02000603000000020004" pitchFamily="50" charset="0"/>
+                <a:cs typeface="Inter Medium" panose="02000603000000020004" pitchFamily="50" charset="0"/>
+                <a:hlinkClick r:id="rId3"/>
+              </a:rPr>
+              <a:t>@t165_hakaton_max_bot</a:t>
             </a:r>
             <a:endParaRPr kumimoji="0" lang="ru-RU" altLang="ru-RU" sz="1800" b="0" i="0" u="none" strike="noStrike" cap="none" normalizeH="0" baseline="0" dirty="0">
               <a:ln>
@@ -1796,7 +1770,7 @@
         <p:spPr bwMode="auto">
           <a:xfrm>
             <a:off x="388620" y="1271417"/>
-            <a:ext cx="2656496" cy="523220"/>
+            <a:ext cx="2534668" cy="523220"/>
           </a:xfrm>
           <a:prstGeom prst="rect">
             <a:avLst/>
@@ -1844,21 +1818,13 @@
           </a:bodyPr>
           <a:lstStyle/>
           <a:p>
-            <a:pPr marL="0" marR="0" lvl="0" indent="0" algn="l" defTabSz="914400" rtl="0" eaLnBrk="0" fontAlgn="base" latinLnBrk="0" hangingPunct="0">
-              <a:lnSpc>
-                <a:spcPct val="100000"/>
-              </a:lnSpc>
+            <a:pPr lvl="0" eaLnBrk="0" fontAlgn="base" hangingPunct="0">
               <a:spcBef>
                 <a:spcPct val="0"/>
               </a:spcBef>
               <a:spcAft>
                 <a:spcPct val="0"/>
               </a:spcAft>
-              <a:buClrTx/>
-              <a:buSzTx/>
-              <a:buFontTx/>
-              <a:buNone/>
-              <a:tabLst/>
             </a:pPr>
             <a:r>
               <a:rPr kumimoji="0" lang="ru-RU" altLang="ru-RU" sz="1800" b="1" i="0" u="none" strike="noStrike" cap="none" normalizeH="0" baseline="0" dirty="0" err="1">
@@ -1890,29 +1856,34 @@
               </a:rPr>
             </a:br>
             <a:r>
-              <a:rPr kumimoji="0" lang="ru-RU" altLang="ru-RU" sz="1000" b="0" i="0" u="none" strike="noStrike" cap="none" normalizeH="0" baseline="0" dirty="0">
-                <a:ln>
-                  <a:noFill/>
-                </a:ln>
-                <a:solidFill>
-                  <a:srgbClr val="0A1650"/>
-                </a:solidFill>
-                <a:effectLst/>
-                <a:latin typeface="Inter Medium" panose="02000603000000020004" pitchFamily="50" charset="0"/>
-                <a:ea typeface="Inter Medium" panose="02000603000000020004" pitchFamily="50" charset="0"/>
-                <a:cs typeface="Inter Medium" panose="02000603000000020004" pitchFamily="50" charset="0"/>
-              </a:rPr>
-              <a:t>ссылка на репозиторий</a:t>
-            </a:r>
-            <a:r>
-              <a:rPr kumimoji="0" lang="en-US" altLang="ru-RU" sz="1000" b="0" i="0" u="none" strike="noStrike" cap="none" normalizeH="0" baseline="0" dirty="0">
-                <a:ln>
-                  <a:noFill/>
-                </a:ln>
-                <a:solidFill>
-                  <a:srgbClr val="0A1650"/>
-                </a:solidFill>
-                <a:effectLst/>
+              <a:rPr lang="ru-RU" altLang="ru-RU" sz="1000" dirty="0">
+                <a:solidFill>
+                  <a:srgbClr val="0A1650"/>
+                </a:solidFill>
+                <a:latin typeface="Inter Medium" panose="02000603000000020004" pitchFamily="50" charset="0"/>
+                <a:ea typeface="Inter Medium" panose="02000603000000020004" pitchFamily="50" charset="0"/>
+                <a:cs typeface="Inter Medium" panose="02000603000000020004" pitchFamily="50" charset="0"/>
+                <a:hlinkClick r:id="rId4"/>
+              </a:rPr>
+              <a:t>github.com/W0LIF/</a:t>
+            </a:r>
+            <a:r>
+              <a:rPr lang="ru-RU" altLang="ru-RU" sz="1000" dirty="0" err="1">
+                <a:solidFill>
+                  <a:srgbClr val="0A1650"/>
+                </a:solidFill>
+                <a:latin typeface="Inter Medium" panose="02000603000000020004" pitchFamily="50" charset="0"/>
+                <a:ea typeface="Inter Medium" panose="02000603000000020004" pitchFamily="50" charset="0"/>
+                <a:cs typeface="Inter Medium" panose="02000603000000020004" pitchFamily="50" charset="0"/>
+                <a:hlinkClick r:id="rId4"/>
+              </a:rPr>
+              <a:t>max_bot</a:t>
+            </a:r>
+            <a:r>
+              <a:rPr lang="en-US" altLang="ru-RU" sz="1000" dirty="0">
+                <a:solidFill>
+                  <a:srgbClr val="0A1650"/>
+                </a:solidFill>
                 <a:latin typeface="Inter Medium" panose="02000603000000020004" pitchFamily="50" charset="0"/>
                 <a:ea typeface="Inter Medium" panose="02000603000000020004" pitchFamily="50" charset="0"/>
                 <a:cs typeface="Inter Medium" panose="02000603000000020004" pitchFamily="50" charset="0"/>
@@ -1928,7 +1899,7 @@
                 <a:ea typeface="Inter Medium" panose="02000603000000020004" pitchFamily="50" charset="0"/>
                 <a:cs typeface="Inter Medium" panose="02000603000000020004" pitchFamily="50" charset="0"/>
               </a:rPr>
-              <a:t>и </a:t>
+              <a:t>HEAD </a:t>
             </a:r>
             <a:r>
               <a:rPr lang="en-US" sz="1000" dirty="0">
@@ -1939,23 +1910,20 @@
                 <a:ea typeface="Inter Medium" panose="02000603000000020004" pitchFamily="50" charset="0"/>
                 <a:cs typeface="Inter Medium" panose="02000603000000020004" pitchFamily="50" charset="0"/>
               </a:rPr>
-              <a:t>commit hash</a:t>
-            </a:r>
-            <a:r>
-              <a:rPr kumimoji="0" lang="ru-RU" altLang="ru-RU" sz="1000" b="0" i="0" u="none" strike="noStrike" cap="none" normalizeH="0" baseline="0" dirty="0">
-                <a:ln>
-                  <a:noFill/>
-                </a:ln>
-                <a:solidFill>
-                  <a:srgbClr val="0A1650"/>
-                </a:solidFill>
-                <a:effectLst/>
-                <a:latin typeface="Inter Medium" panose="02000603000000020004" pitchFamily="50" charset="0"/>
-                <a:ea typeface="Inter Medium" panose="02000603000000020004" pitchFamily="50" charset="0"/>
-                <a:cs typeface="Inter Medium" panose="02000603000000020004" pitchFamily="50" charset="0"/>
-              </a:rPr>
-              <a:t> </a:t>
-            </a:r>
+              <a:t>76a9620*</a:t>
+            </a:r>
+            <a:endParaRPr kumimoji="0" lang="ru-RU" altLang="ru-RU" sz="1000" b="0" i="0" u="none" strike="noStrike" cap="none" normalizeH="0" baseline="0" dirty="0">
+              <a:ln>
+                <a:noFill/>
+              </a:ln>
+              <a:solidFill>
+                <a:srgbClr val="0A1650"/>
+              </a:solidFill>
+              <a:effectLst/>
+              <a:latin typeface="Inter Medium" panose="02000603000000020004" pitchFamily="50" charset="0"/>
+              <a:ea typeface="Inter Medium" panose="02000603000000020004" pitchFamily="50" charset="0"/>
+              <a:cs typeface="Inter Medium" panose="02000603000000020004" pitchFamily="50" charset="0"/>
+            </a:endParaRPr>
           </a:p>
         </p:txBody>
       </p:sp>
@@ -1976,7 +1944,7 @@
         <p:spPr bwMode="auto">
           <a:xfrm>
             <a:off x="387178" y="1947817"/>
-            <a:ext cx="806631" cy="523220"/>
+            <a:ext cx="2114681" cy="523220"/>
           </a:xfrm>
           <a:prstGeom prst="rect">
             <a:avLst/>
@@ -2024,21 +1992,13 @@
           </a:bodyPr>
           <a:lstStyle/>
           <a:p>
-            <a:pPr marL="0" marR="0" lvl="0" indent="0" algn="l" defTabSz="914400" rtl="0" eaLnBrk="0" fontAlgn="base" latinLnBrk="0" hangingPunct="0">
-              <a:lnSpc>
-                <a:spcPct val="100000"/>
-              </a:lnSpc>
+            <a:pPr lvl="0" eaLnBrk="0" fontAlgn="base" hangingPunct="0">
               <a:spcBef>
                 <a:spcPct val="0"/>
               </a:spcBef>
               <a:spcAft>
                 <a:spcPct val="0"/>
               </a:spcAft>
-              <a:buClrTx/>
-              <a:buSzTx/>
-              <a:buFontTx/>
-              <a:buNone/>
-              <a:tabLst/>
             </a:pPr>
             <a:r>
               <a:rPr kumimoji="0" lang="ru-RU" altLang="ru-RU" sz="1800" b="1" i="0" u="none" strike="noStrike" cap="none" normalizeH="0" baseline="0" dirty="0">
@@ -2070,19 +2030,16 @@
               </a:rPr>
             </a:br>
             <a:r>
-              <a:rPr kumimoji="0" lang="ru-RU" altLang="ru-RU" sz="1000" b="0" i="0" u="none" strike="noStrike" cap="none" normalizeH="0" baseline="0" dirty="0">
-                <a:ln>
-                  <a:noFill/>
-                </a:ln>
-                <a:solidFill>
-                  <a:srgbClr val="0A1650"/>
-                </a:solidFill>
-                <a:effectLst/>
-                <a:latin typeface="Inter Medium" panose="02000603000000020004" pitchFamily="50" charset="0"/>
-                <a:ea typeface="Inter Medium" panose="02000603000000020004" pitchFamily="50" charset="0"/>
-                <a:cs typeface="Inter Medium" panose="02000603000000020004" pitchFamily="50" charset="0"/>
-              </a:rPr>
-              <a:t>адрес API</a:t>
+              <a:rPr lang="ru-RU" altLang="ru-RU" sz="1000" dirty="0">
+                <a:solidFill>
+                  <a:srgbClr val="0A1650"/>
+                </a:solidFill>
+                <a:latin typeface="Inter Medium" panose="02000603000000020004" pitchFamily="50" charset="0"/>
+                <a:ea typeface="Inter Medium" panose="02000603000000020004" pitchFamily="50" charset="0"/>
+                <a:cs typeface="Inter Medium" panose="02000603000000020004" pitchFamily="50" charset="0"/>
+                <a:hlinkClick r:id="rId5"/>
+              </a:rPr>
+              <a:t>https://max-bot-sable.vercel.app/api</a:t>
             </a:r>
             <a:endParaRPr kumimoji="0" lang="ru-RU" altLang="ru-RU" sz="1800" b="0" i="0" u="none" strike="noStrike" cap="none" normalizeH="0" baseline="0" dirty="0">
               <a:ln>
@@ -2101,10 +2058,10 @@
       </p:sp>
       <p:sp>
         <p:nvSpPr>
-          <p:cNvPr id="10" name="Rectangle 4">
+          <p:cNvPr id="11" name="Rectangle 5">
             <a:extLst>
               <a:ext uri="{FF2B5EF4-FFF2-40B4-BE49-F238E27FC236}">
-                <a16:creationId xmlns:a16="http://schemas.microsoft.com/office/drawing/2014/main" id="{E9BC0C4D-7BDF-4A4C-B783-65137B0478BC}"/>
+                <a16:creationId xmlns:a16="http://schemas.microsoft.com/office/drawing/2014/main" id="{C84BEDB6-5059-4A07-91E5-B711C1888E03}"/>
               </a:ext>
             </a:extLst>
           </p:cNvPr>
@@ -2115,8 +2072,8 @@
         </p:nvSpPr>
         <p:spPr bwMode="auto">
           <a:xfrm>
-            <a:off x="387178" y="3032330"/>
-            <a:ext cx="2282997" cy="677108"/>
+            <a:off x="388620" y="3833138"/>
+            <a:ext cx="2289409" cy="677108"/>
           </a:xfrm>
           <a:prstGeom prst="rect">
             <a:avLst/>
@@ -2164,21 +2121,13 @@
           </a:bodyPr>
           <a:lstStyle/>
           <a:p>
-            <a:pPr marL="0" marR="0" lvl="0" indent="0" algn="l" defTabSz="914400" rtl="0" eaLnBrk="0" fontAlgn="base" latinLnBrk="0" hangingPunct="0">
-              <a:lnSpc>
-                <a:spcPct val="100000"/>
-              </a:lnSpc>
+            <a:pPr lvl="0" eaLnBrk="0" fontAlgn="base" hangingPunct="0">
               <a:spcBef>
                 <a:spcPct val="0"/>
               </a:spcBef>
               <a:spcAft>
                 <a:spcPct val="0"/>
               </a:spcAft>
-              <a:buClrTx/>
-              <a:buSzTx/>
-              <a:buFontTx/>
-              <a:buNone/>
-              <a:tabLst/>
             </a:pPr>
             <a:r>
               <a:rPr kumimoji="0" lang="ru-RU" altLang="ru-RU" sz="1800" b="1" i="0" u="none" strike="noStrike" cap="none" normalizeH="0" baseline="0" dirty="0">
@@ -2193,7 +2142,7 @@
                 <a:ea typeface="Inter Black" panose="02000A03000000020004" pitchFamily="50" charset="0"/>
                 <a:cs typeface="Inter Black" panose="02000A03000000020004" pitchFamily="50" charset="0"/>
               </a:rPr>
-              <a:t>Тестовый доступ</a:t>
+              <a:t>Environment</a:t>
             </a:r>
             <a:br>
               <a:rPr kumimoji="0" lang="ru-RU" altLang="ru-RU" sz="1800" b="0" i="0" u="none" strike="noStrike" cap="none" normalizeH="0" baseline="0" dirty="0">
@@ -2204,212 +2153,32 @@
                   <a:srgbClr val="0A1650"/>
                 </a:solidFill>
                 <a:effectLst/>
-                <a:latin typeface="Inter Medium" panose="02000603000000020004" pitchFamily="50" charset="0"/>
-                <a:ea typeface="Inter Medium" panose="02000603000000020004" pitchFamily="50" charset="0"/>
-                <a:cs typeface="Inter Medium" panose="02000603000000020004" pitchFamily="50" charset="0"/>
-              </a:rPr>
-            </a:br>
-            <a:r>
-              <a:rPr kumimoji="0" lang="ru-RU" altLang="ru-RU" sz="1000" b="0" i="0" u="none" strike="noStrike" cap="none" normalizeH="0" baseline="0" dirty="0">
-                <a:ln>
-                  <a:noFill/>
-                </a:ln>
-                <a:solidFill>
-                  <a:srgbClr val="0A1650"/>
-                </a:solidFill>
-                <a:effectLst/>
-                <a:latin typeface="Inter Medium" panose="02000603000000020004" pitchFamily="50" charset="0"/>
-                <a:ea typeface="Inter Medium" panose="02000603000000020004" pitchFamily="50" charset="0"/>
-                <a:cs typeface="Inter Medium" panose="02000603000000020004" pitchFamily="50" charset="0"/>
-              </a:rPr>
-              <a:t>Логин: </a:t>
-            </a:r>
-            <a:r>
-              <a:rPr kumimoji="0" lang="ru-RU" altLang="ru-RU" sz="1000" b="0" i="0" u="none" strike="noStrike" cap="none" normalizeH="0" baseline="0" dirty="0" err="1">
-                <a:ln>
-                  <a:noFill/>
-                </a:ln>
-                <a:solidFill>
-                  <a:srgbClr val="0A1650"/>
-                </a:solidFill>
-                <a:effectLst/>
-                <a:latin typeface="Inter Medium" panose="02000603000000020004" pitchFamily="50" charset="0"/>
-                <a:ea typeface="Inter Medium" panose="02000603000000020004" pitchFamily="50" charset="0"/>
-                <a:cs typeface="Inter Medium" panose="02000603000000020004" pitchFamily="50" charset="0"/>
-              </a:rPr>
-              <a:t>test</a:t>
-            </a:r>
-            <a:r>
-              <a:rPr kumimoji="0" lang="ru-RU" altLang="ru-RU" sz="1000" b="0" i="0" u="none" strike="noStrike" cap="none" normalizeH="0" baseline="0" dirty="0">
-                <a:ln>
-                  <a:noFill/>
-                </a:ln>
-                <a:solidFill>
-                  <a:srgbClr val="0A1650"/>
-                </a:solidFill>
-                <a:effectLst/>
-                <a:latin typeface="Inter Medium" panose="02000603000000020004" pitchFamily="50" charset="0"/>
-                <a:ea typeface="Inter Medium" panose="02000603000000020004" pitchFamily="50" charset="0"/>
-                <a:cs typeface="Inter Medium" panose="02000603000000020004" pitchFamily="50" charset="0"/>
-              </a:rPr>
-              <a:t>@...</a:t>
-            </a:r>
-            <a:br>
-              <a:rPr kumimoji="0" lang="ru-RU" altLang="ru-RU" sz="1000" b="0" i="0" u="none" strike="noStrike" cap="none" normalizeH="0" baseline="0" dirty="0">
-                <a:ln>
-                  <a:noFill/>
-                </a:ln>
-                <a:solidFill>
-                  <a:srgbClr val="0A1650"/>
-                </a:solidFill>
-                <a:effectLst/>
-                <a:latin typeface="Inter Medium" panose="02000603000000020004" pitchFamily="50" charset="0"/>
-                <a:ea typeface="Inter Medium" panose="02000603000000020004" pitchFamily="50" charset="0"/>
-                <a:cs typeface="Inter Medium" panose="02000603000000020004" pitchFamily="50" charset="0"/>
-              </a:rPr>
-            </a:br>
-            <a:r>
-              <a:rPr kumimoji="0" lang="ru-RU" altLang="ru-RU" sz="1000" b="0" i="0" u="none" strike="noStrike" cap="none" normalizeH="0" baseline="0" dirty="0">
-                <a:ln>
-                  <a:noFill/>
-                </a:ln>
-                <a:solidFill>
-                  <a:srgbClr val="0A1650"/>
-                </a:solidFill>
-                <a:effectLst/>
-                <a:latin typeface="Inter Medium" panose="02000603000000020004" pitchFamily="50" charset="0"/>
-                <a:ea typeface="Inter Medium" panose="02000603000000020004" pitchFamily="50" charset="0"/>
-                <a:cs typeface="Inter Medium" panose="02000603000000020004" pitchFamily="50" charset="0"/>
-              </a:rPr>
-              <a:t>Пароль: •••••••• </a:t>
-            </a:r>
-          </a:p>
-        </p:txBody>
-      </p:sp>
-      <p:sp>
-        <p:nvSpPr>
-          <p:cNvPr id="11" name="Rectangle 5">
-            <a:extLst>
-              <a:ext uri="{FF2B5EF4-FFF2-40B4-BE49-F238E27FC236}">
-                <a16:creationId xmlns:a16="http://schemas.microsoft.com/office/drawing/2014/main" id="{C84BEDB6-5059-4A07-91E5-B711C1888E03}"/>
-              </a:ext>
-            </a:extLst>
-          </p:cNvPr>
-          <p:cNvSpPr>
-            <a:spLocks noChangeArrowheads="1"/>
-          </p:cNvSpPr>
-          <p:nvPr/>
-        </p:nvSpPr>
-        <p:spPr bwMode="auto">
-          <a:xfrm>
-            <a:off x="388620" y="3833138"/>
-            <a:ext cx="1667444" cy="677108"/>
-          </a:xfrm>
-          <a:prstGeom prst="rect">
-            <a:avLst/>
-          </a:prstGeom>
-          <a:noFill/>
-          <a:ln>
-            <a:noFill/>
-          </a:ln>
-          <a:effectLst/>
-          <a:extLst>
-            <a:ext uri="{909E8E84-426E-40DD-AFC4-6F175D3DCCD1}">
-              <a14:hiddenFill xmlns:a14="http://schemas.microsoft.com/office/drawing/2010/main">
-                <a:solidFill>
-                  <a:schemeClr val="accent1"/>
-                </a:solidFill>
-              </a14:hiddenFill>
-            </a:ext>
-            <a:ext uri="{91240B29-F687-4F45-9708-019B960494DF}">
-              <a14:hiddenLine xmlns:a14="http://schemas.microsoft.com/office/drawing/2010/main" w="9525">
-                <a:solidFill>
-                  <a:schemeClr val="tx1"/>
-                </a:solidFill>
-                <a:miter lim="800000"/>
-                <a:headEnd/>
-                <a:tailEnd/>
-              </a14:hiddenLine>
-            </a:ext>
-            <a:ext uri="{AF507438-7753-43E0-B8FC-AC1667EBCBE1}">
-              <a14:hiddenEffects xmlns:a14="http://schemas.microsoft.com/office/drawing/2010/main">
-                <a:effectLst>
-                  <a:outerShdw dist="35921" dir="2700000" algn="ctr" rotWithShape="0">
-                    <a:schemeClr val="bg2"/>
-                  </a:outerShdw>
-                </a:effectLst>
-              </a14:hiddenEffects>
-            </a:ext>
-          </a:extLst>
-        </p:spPr>
-        <p:txBody>
-          <a:bodyPr vert="horz" wrap="none" lIns="91440" tIns="45720" rIns="91440" bIns="45720" numCol="1" anchor="ctr" anchorCtr="0" compatLnSpc="1">
-            <a:prstTxWarp prst="textNoShape">
-              <a:avLst/>
-            </a:prstTxWarp>
-            <a:spAutoFit/>
-          </a:bodyPr>
-          <a:lstStyle/>
-          <a:p>
-            <a:pPr marL="0" marR="0" lvl="0" indent="0" algn="l" defTabSz="914400" rtl="0" eaLnBrk="0" fontAlgn="base" latinLnBrk="0" hangingPunct="0">
-              <a:lnSpc>
-                <a:spcPct val="100000"/>
-              </a:lnSpc>
-              <a:spcBef>
-                <a:spcPct val="0"/>
-              </a:spcBef>
-              <a:spcAft>
-                <a:spcPct val="0"/>
-              </a:spcAft>
-              <a:buClrTx/>
-              <a:buSzTx/>
-              <a:buFontTx/>
-              <a:buNone/>
-              <a:tabLst/>
-            </a:pPr>
-            <a:r>
-              <a:rPr kumimoji="0" lang="ru-RU" altLang="ru-RU" sz="1800" b="1" i="0" u="none" strike="noStrike" cap="none" normalizeH="0" baseline="0" dirty="0">
-                <a:ln>
-                  <a:noFill/>
-                </a:ln>
-                <a:solidFill>
-                  <a:srgbClr val="0A1650"/>
-                </a:solidFill>
-                <a:effectLst/>
                 <a:latin typeface="Inter Black" panose="02000A03000000020004" pitchFamily="50" charset="0"/>
                 <a:ea typeface="Inter Black" panose="02000A03000000020004" pitchFamily="50" charset="0"/>
                 <a:cs typeface="Inter Black" panose="02000A03000000020004" pitchFamily="50" charset="0"/>
               </a:rPr>
-              <a:t>Environment</a:t>
-            </a:r>
-            <a:br>
-              <a:rPr kumimoji="0" lang="ru-RU" altLang="ru-RU" sz="1800" b="0" i="0" u="none" strike="noStrike" cap="none" normalizeH="0" baseline="0" dirty="0">
-                <a:ln>
-                  <a:noFill/>
-                </a:ln>
-                <a:solidFill>
-                  <a:srgbClr val="0A1650"/>
-                </a:solidFill>
-                <a:effectLst/>
-                <a:latin typeface="Inter Black" panose="02000A03000000020004" pitchFamily="50" charset="0"/>
-                <a:ea typeface="Inter Black" panose="02000A03000000020004" pitchFamily="50" charset="0"/>
-                <a:cs typeface="Inter Black" panose="02000A03000000020004" pitchFamily="50" charset="0"/>
-              </a:rPr>
             </a:br>
             <a:r>
-              <a:rPr kumimoji="0" lang="ru-RU" altLang="ru-RU" sz="1000" b="0" i="0" u="none" strike="noStrike" cap="none" normalizeH="0" baseline="0" dirty="0">
-                <a:ln>
-                  <a:noFill/>
-                </a:ln>
-                <a:solidFill>
-                  <a:srgbClr val="0A1650"/>
-                </a:solidFill>
-                <a:effectLst/>
-                <a:latin typeface="Inter Medium" panose="02000603000000020004" pitchFamily="50" charset="0"/>
-                <a:ea typeface="Inter Medium" panose="02000603000000020004" pitchFamily="50" charset="0"/>
-                <a:cs typeface="Inter Medium" panose="02000603000000020004" pitchFamily="50" charset="0"/>
-              </a:rPr>
-              <a:t>BOT_TOKEN=...</a:t>
+              <a:rPr lang="ru-RU" altLang="ru-RU" sz="1000" dirty="0">
+                <a:solidFill>
+                  <a:srgbClr val="0A1650"/>
+                </a:solidFill>
+                <a:latin typeface="Inter Medium" panose="02000603000000020004" pitchFamily="50" charset="0"/>
+                <a:ea typeface="Inter Medium" panose="02000603000000020004" pitchFamily="50" charset="0"/>
+                <a:cs typeface="Inter Medium" panose="02000603000000020004" pitchFamily="50" charset="0"/>
+              </a:rPr>
+              <a:t>WEBAPP_URL=</a:t>
+            </a:r>
+            <a:r>
+              <a:rPr lang="ru-RU" altLang="ru-RU" sz="1000" dirty="0" err="1">
+                <a:solidFill>
+                  <a:srgbClr val="0A1650"/>
+                </a:solidFill>
+                <a:latin typeface="Inter Medium" panose="02000603000000020004" pitchFamily="50" charset="0"/>
+                <a:ea typeface="Inter Medium" panose="02000603000000020004" pitchFamily="50" charset="0"/>
+                <a:cs typeface="Inter Medium" panose="02000603000000020004" pitchFamily="50" charset="0"/>
+              </a:rPr>
+              <a:t>max-bot-sable.vercel.app</a:t>
             </a:r>
             <a:br>
               <a:rPr kumimoji="0" lang="ru-RU" altLang="ru-RU" sz="600" b="0" i="0" u="none" strike="noStrike" cap="none" normalizeH="0" baseline="0" dirty="0">
@@ -2426,34 +2195,26 @@
               </a:rPr>
             </a:br>
             <a:r>
-              <a:rPr kumimoji="0" lang="ru-RU" altLang="ru-RU" sz="1000" b="0" i="0" u="none" strike="noStrike" cap="none" normalizeH="0" baseline="0" dirty="0">
-                <a:ln>
-                  <a:noFill/>
-                </a:ln>
-                <a:solidFill>
-                  <a:srgbClr val="0A1650"/>
-                </a:solidFill>
-                <a:effectLst/>
-                <a:latin typeface="Inter Medium" panose="02000603000000020004" pitchFamily="50" charset="0"/>
-                <a:ea typeface="Inter Medium" panose="02000603000000020004" pitchFamily="50" charset="0"/>
-                <a:cs typeface="Inter Medium" panose="02000603000000020004" pitchFamily="50" charset="0"/>
-              </a:rPr>
-              <a:t>API_URL=...</a:t>
-            </a:r>
-            <a:r>
-              <a:rPr kumimoji="0" lang="ru-RU" altLang="ru-RU" sz="600" b="0" i="0" u="none" strike="noStrike" cap="none" normalizeH="0" baseline="0" dirty="0">
-                <a:ln>
-                  <a:noFill/>
-                </a:ln>
-                <a:solidFill>
-                  <a:srgbClr val="0A1650"/>
-                </a:solidFill>
-                <a:effectLst/>
-                <a:latin typeface="Inter Medium" panose="02000603000000020004" pitchFamily="50" charset="0"/>
-                <a:ea typeface="Inter Medium" panose="02000603000000020004" pitchFamily="50" charset="0"/>
-                <a:cs typeface="Inter Medium" panose="02000603000000020004" pitchFamily="50" charset="0"/>
-              </a:rPr>
-              <a:t> </a:t>
+              <a:rPr lang="ru-RU" altLang="ru-RU" sz="1000" dirty="0">
+                <a:solidFill>
+                  <a:srgbClr val="0A1650"/>
+                </a:solidFill>
+                <a:latin typeface="Inter Medium" panose="02000603000000020004" pitchFamily="50" charset="0"/>
+                <a:ea typeface="Inter Medium" panose="02000603000000020004" pitchFamily="50" charset="0"/>
+                <a:cs typeface="Inter Medium" panose="02000603000000020004" pitchFamily="50" charset="0"/>
+              </a:rPr>
+              <a:t>Секреты хранятся в </a:t>
+            </a:r>
+            <a:r>
+              <a:rPr lang="ru-RU" altLang="ru-RU" sz="1000" dirty="0" err="1">
+                <a:solidFill>
+                  <a:srgbClr val="0A1650"/>
+                </a:solidFill>
+                <a:latin typeface="Inter Medium" panose="02000603000000020004" pitchFamily="50" charset="0"/>
+                <a:ea typeface="Inter Medium" panose="02000603000000020004" pitchFamily="50" charset="0"/>
+                <a:cs typeface="Inter Medium" panose="02000603000000020004" pitchFamily="50" charset="0"/>
+              </a:rPr>
+              <a:t>Vercel</a:t>
             </a:r>
             <a:endParaRPr kumimoji="0" lang="ru-RU" altLang="ru-RU" sz="1800" b="0" i="0" u="none" strike="noStrike" cap="none" normalizeH="0" baseline="0" dirty="0">
               <a:ln>
@@ -2484,8 +2245,8 @@
         </p:nvSpPr>
         <p:spPr>
           <a:xfrm>
-            <a:off x="4206240" y="2202418"/>
-            <a:ext cx="2827020" cy="369332"/>
+            <a:off x="4051179" y="2132261"/>
+            <a:ext cx="4705643" cy="1600438"/>
           </a:xfrm>
           <a:prstGeom prst="rect">
             <a:avLst/>
@@ -2499,28 +2260,15 @@
           <a:lstStyle/>
           <a:p>
             <a:r>
-              <a:rPr lang="ru-RU" b="1" dirty="0">
-                <a:solidFill>
-                  <a:srgbClr val="0A1650"/>
-                </a:solidFill>
-                <a:latin typeface="Inter Black" panose="02000A03000000020004" pitchFamily="50" charset="0"/>
-                <a:ea typeface="Inter Black" panose="02000A03000000020004" pitchFamily="50" charset="0"/>
-                <a:cs typeface="Inter Black" panose="02000A03000000020004" pitchFamily="50" charset="0"/>
+              <a:rPr lang="ru-RU" sz="1400" b="1" dirty="0">
+                <a:solidFill>
+                  <a:srgbClr val="0A1650"/>
+                </a:solidFill>
+                <a:latin typeface="Inter Black"/>
               </a:rPr>
               <a:t>Основной сценарий</a:t>
             </a:r>
-            <a:r>
-              <a:rPr lang="en-US" b="1" dirty="0">
-                <a:solidFill>
-                  <a:srgbClr val="0A1650"/>
-                </a:solidFill>
-                <a:latin typeface="Inter Medium" panose="02000603000000020004" pitchFamily="50" charset="0"/>
-                <a:ea typeface="Inter Medium" panose="02000603000000020004" pitchFamily="50" charset="0"/>
-                <a:cs typeface="Inter Medium" panose="02000603000000020004" pitchFamily="50" charset="0"/>
-              </a:rPr>
-              <a:t>:</a:t>
-            </a:r>
-            <a:endParaRPr lang="ru-RU" dirty="0">
+            <a:endParaRPr lang="ru-RU" sz="1400" dirty="0">
               <a:solidFill>
                 <a:srgbClr val="0A1650"/>
               </a:solidFill>
@@ -2528,6 +2276,72 @@
               <a:ea typeface="Inter Medium" panose="02000603000000020004" pitchFamily="50" charset="0"/>
               <a:cs typeface="Inter Medium" panose="02000603000000020004" pitchFamily="50" charset="0"/>
             </a:endParaRPr>
+          </a:p>
+          <a:p>
+            <a:r>
+              <a:rPr lang="ru-RU" sz="1200" b="1" dirty="0">
+                <a:solidFill>
+                  <a:srgbClr val="0A1650"/>
+                </a:solidFill>
+                <a:latin typeface="Inter Black"/>
+              </a:rPr>
+              <a:t>1. Открыть бота в MAX, принять политику и выбрать напоминания.</a:t>
+            </a:r>
+          </a:p>
+          <a:p>
+            <a:r>
+              <a:rPr lang="ru-RU" sz="1200" b="1" dirty="0">
+                <a:solidFill>
+                  <a:srgbClr val="0A1650"/>
+                </a:solidFill>
+                <a:latin typeface="Inter Black"/>
+              </a:rPr>
+              <a:t>2. Открыть мини-приложение кнопкой из меню бота.</a:t>
+            </a:r>
+          </a:p>
+          <a:p>
+            <a:r>
+              <a:rPr lang="ru-RU" sz="1200" b="1" dirty="0">
+                <a:solidFill>
+                  <a:srgbClr val="0A1650"/>
+                </a:solidFill>
+                <a:latin typeface="Inter Black"/>
+              </a:rPr>
+              <a:t>3. Создать задачу вручную или загрузить фото и проверить OCR-черновик.</a:t>
+            </a:r>
+          </a:p>
+          <a:p>
+            <a:r>
+              <a:rPr lang="ru-RU" sz="1200" b="1" dirty="0">
+                <a:solidFill>
+                  <a:srgbClr val="0A1650"/>
+                </a:solidFill>
+                <a:latin typeface="Inter Black"/>
+              </a:rPr>
+              <a:t>4. Выбрать квадрант Эйзенхауэра и сохранить задачу.</a:t>
+            </a:r>
+          </a:p>
+          <a:p>
+            <a:r>
+              <a:rPr lang="ru-RU" sz="1200" b="1" dirty="0">
+                <a:solidFill>
+                  <a:srgbClr val="0A1650"/>
+                </a:solidFill>
+                <a:latin typeface="Inter Black"/>
+              </a:rPr>
+              <a:t>5. Выполнить задачу и отметить настроение.</a:t>
+            </a:r>
+          </a:p>
+          <a:p>
+            <a:r>
+              <a:rPr lang="ru-RU" sz="1200" b="1" dirty="0">
+                <a:solidFill>
+                  <a:srgbClr val="0A1650"/>
+                </a:solidFill>
+                <a:latin typeface="Inter Black"/>
+              </a:rPr>
+              <a:t>6. Смотреть недельный баланс и получать напоминания о сроках.</a:t>
+            </a:r>
           </a:p>
         </p:txBody>
       </p:sp>
@@ -3013,8 +2827,8 @@
         </p:nvSpPr>
         <p:spPr>
           <a:xfrm>
-            <a:off x="457200" y="804672"/>
-            <a:ext cx="2209267" cy="320040"/>
+            <a:off x="457200" y="822960"/>
+            <a:ext cx="2822448" cy="301752"/>
           </a:xfrm>
           <a:prstGeom prst="rect">
             <a:avLst/>
@@ -3026,54 +2840,52 @@
           <a:bodyPr wrap="square" lIns="0" tIns="0" rIns="0" bIns="0" rtlCol="0" anchor="ctr"/>
           <a:lstStyle/>
           <a:p>
-            <a:pPr marL="0" indent="0">
-              <a:buNone/>
-            </a:pPr>
-            <a:r>
-              <a:rPr lang="en-US" sz="1300" dirty="0" err="1">
+            <a:r>
+              <a:rPr lang="en-US" sz="1400" dirty="0">
                 <a:solidFill>
                   <a:srgbClr val="3F6BC5"/>
                 </a:solidFill>
-                <a:latin typeface="Inter Medium" panose="02000603000000020004" pitchFamily="50" charset="0"/>
-                <a:ea typeface="Inter Medium" panose="02000603000000020004" pitchFamily="50" charset="0"/>
-                <a:cs typeface="Inter Medium" panose="02000603000000020004" pitchFamily="50" charset="0"/>
-              </a:rPr>
-              <a:t>Предварительная</a:t>
-            </a:r>
-            <a:r>
-              <a:rPr lang="en-US" sz="1300" dirty="0">
+                <a:latin typeface="Inter Medium"/>
+              </a:rPr>
+              <a:t>Production: </a:t>
+            </a:r>
+            <a:r>
+              <a:rPr lang="en-US" sz="1400" dirty="0" err="1">
                 <a:solidFill>
                   <a:srgbClr val="3F6BC5"/>
                 </a:solidFill>
-                <a:latin typeface="Inter Medium" panose="02000603000000020004" pitchFamily="50" charset="0"/>
-                <a:ea typeface="Inter Medium" panose="02000603000000020004" pitchFamily="50" charset="0"/>
-                <a:cs typeface="Inter Medium" panose="02000603000000020004" pitchFamily="50" charset="0"/>
-              </a:rPr>
-              <a:t> </a:t>
-            </a:r>
-            <a:r>
-              <a:rPr lang="en-US" sz="1300" dirty="0" err="1">
+                <a:latin typeface="Inter Medium"/>
+              </a:rPr>
+              <a:t>Vercel</a:t>
+            </a:r>
+            <a:r>
+              <a:rPr lang="en-US" sz="1400" dirty="0">
                 <a:solidFill>
                   <a:srgbClr val="3F6BC5"/>
                 </a:solidFill>
-                <a:latin typeface="Inter Medium" panose="02000603000000020004" pitchFamily="50" charset="0"/>
-                <a:ea typeface="Inter Medium" panose="02000603000000020004" pitchFamily="50" charset="0"/>
-                <a:cs typeface="Inter Medium" panose="02000603000000020004" pitchFamily="50" charset="0"/>
-              </a:rPr>
-              <a:t>схема</a:t>
-            </a:r>
-            <a:r>
-              <a:rPr lang="ru-RU" sz="1300" dirty="0">
+                <a:latin typeface="Inter Medium"/>
+              </a:rPr>
+              <a:t> · </a:t>
+            </a:r>
+            <a:r>
+              <a:rPr lang="ru-RU" sz="1400" dirty="0">
                 <a:solidFill>
                   <a:srgbClr val="3F6BC5"/>
                 </a:solidFill>
-                <a:latin typeface="Inter Medium" panose="02000603000000020004" pitchFamily="50" charset="0"/>
-                <a:ea typeface="Inter Medium" panose="02000603000000020004" pitchFamily="50" charset="0"/>
-                <a:cs typeface="Inter Medium" panose="02000603000000020004" pitchFamily="50" charset="0"/>
-              </a:rPr>
-              <a:t>??</a:t>
-            </a:r>
-            <a:endParaRPr lang="en-US" sz="1300" dirty="0">
+                <a:latin typeface="Inter Medium"/>
+              </a:rPr>
+              <a:t>локально: </a:t>
+            </a:r>
+            <a:r>
+              <a:rPr lang="en-US" sz="1400" dirty="0">
+                <a:solidFill>
+                  <a:srgbClr val="3F6BC5"/>
+                </a:solidFill>
+                <a:latin typeface="Inter Medium"/>
+              </a:rPr>
+              <a:t>Docker</a:t>
+            </a:r>
+            <a:endParaRPr lang="en-US" dirty="0">
               <a:latin typeface="Inter Medium" panose="02000603000000020004" pitchFamily="50" charset="0"/>
               <a:ea typeface="Inter Medium" panose="02000603000000020004" pitchFamily="50" charset="0"/>
               <a:cs typeface="Inter Medium" panose="02000603000000020004" pitchFamily="50" charset="0"/>
@@ -3199,42 +3011,134 @@
           <a:bodyPr wrap="square" lIns="635" tIns="635" rIns="635" bIns="635" rtlCol="0" anchor="ctr"/>
           <a:lstStyle/>
           <a:p>
-            <a:pPr marL="0" indent="0" algn="ctr">
+            <a:pPr marL="0" marR="0" lvl="0" indent="0" algn="ctr" defTabSz="914400" rtl="0" eaLnBrk="1" fontAlgn="auto" latinLnBrk="0" hangingPunct="1">
+              <a:lnSpc>
+                <a:spcPct val="100000"/>
+              </a:lnSpc>
+              <a:spcBef>
+                <a:spcPts val="0"/>
+              </a:spcBef>
+              <a:spcAft>
+                <a:spcPts val="0"/>
+              </a:spcAft>
+              <a:buClrTx/>
+              <a:buSzTx/>
+              <a:buFontTx/>
               <a:buNone/>
+              <a:tabLst/>
+              <a:defRPr/>
             </a:pPr>
             <a:r>
-              <a:rPr lang="en-US" sz="1200" b="1" dirty="0">
-                <a:solidFill>
-                  <a:srgbClr val="0A1650"/>
-                </a:solidFill>
-                <a:latin typeface="Inter Medium" panose="02000603000000020004" pitchFamily="50" charset="0"/>
-                <a:ea typeface="Inter Medium" panose="02000603000000020004" pitchFamily="50" charset="0"/>
-                <a:cs typeface="Inter Medium" panose="02000603000000020004" pitchFamily="50" charset="0"/>
-              </a:rPr>
-              <a:t>Чат-бот</a:t>
-            </a:r>
-            <a:endParaRPr lang="en-US" sz="1200" dirty="0">
+              <a:rPr kumimoji="0" lang="en-US" sz="1100" b="1" i="0" u="none" strike="noStrike" kern="1200" cap="none" spc="0" normalizeH="0" baseline="0" noProof="0" dirty="0">
+                <a:ln>
+                  <a:noFill/>
+                </a:ln>
+                <a:solidFill>
+                  <a:srgbClr val="0A1650"/>
+                </a:solidFill>
+                <a:effectLst/>
+                <a:uLnTx/>
+                <a:uFillTx/>
+                <a:latin typeface="Inter Medium"/>
+                <a:ea typeface="+mn-ea"/>
+                <a:cs typeface="+mn-cs"/>
+              </a:rPr>
+              <a:t>MAX Bot API</a:t>
+            </a:r>
+            <a:endParaRPr kumimoji="0" lang="en-US" sz="1200" b="0" i="0" u="none" strike="noStrike" kern="1200" cap="none" spc="0" normalizeH="0" baseline="0" noProof="0" dirty="0">
+              <a:ln>
+                <a:noFill/>
+              </a:ln>
+              <a:solidFill>
+                <a:prstClr val="black"/>
+              </a:solidFill>
+              <a:effectLst/>
+              <a:uLnTx/>
+              <a:uFillTx/>
               <a:latin typeface="Inter Medium" panose="02000603000000020004" pitchFamily="50" charset="0"/>
               <a:ea typeface="Inter Medium" panose="02000603000000020004" pitchFamily="50" charset="0"/>
               <a:cs typeface="Inter Medium" panose="02000603000000020004" pitchFamily="50" charset="0"/>
             </a:endParaRPr>
           </a:p>
           <a:p>
-            <a:pPr marL="0" indent="0" algn="ctr">
+            <a:pPr marL="0" marR="0" lvl="0" indent="0" algn="ctr" defTabSz="914400" rtl="0" eaLnBrk="1" fontAlgn="auto" latinLnBrk="0" hangingPunct="1">
+              <a:lnSpc>
+                <a:spcPct val="100000"/>
+              </a:lnSpc>
+              <a:spcBef>
+                <a:spcPts val="0"/>
+              </a:spcBef>
+              <a:spcAft>
+                <a:spcPts val="0"/>
+              </a:spcAft>
+              <a:buClrTx/>
+              <a:buSzTx/>
+              <a:buFontTx/>
               <a:buNone/>
+              <a:tabLst/>
+              <a:defRPr/>
             </a:pPr>
             <a:r>
-              <a:rPr lang="en-US" sz="1200" b="1" dirty="0">
-                <a:solidFill>
-                  <a:srgbClr val="0A1650"/>
-                </a:solidFill>
-                <a:latin typeface="Inter Medium" panose="02000603000000020004" pitchFamily="50" charset="0"/>
-                <a:ea typeface="Inter Medium" panose="02000603000000020004" pitchFamily="50" charset="0"/>
-                <a:cs typeface="Inter Medium" panose="02000603000000020004" pitchFamily="50" charset="0"/>
-              </a:rPr>
-              <a:t>(напоминания)</a:t>
-            </a:r>
-            <a:endParaRPr lang="en-US" sz="1200" dirty="0">
+              <a:rPr kumimoji="0" lang="en-US" sz="900" b="1" i="0" u="none" strike="noStrike" kern="1200" cap="none" spc="0" normalizeH="0" baseline="0" noProof="0" dirty="0">
+                <a:ln>
+                  <a:noFill/>
+                </a:ln>
+                <a:solidFill>
+                  <a:srgbClr val="0A1650"/>
+                </a:solidFill>
+                <a:effectLst/>
+                <a:uLnTx/>
+                <a:uFillTx/>
+                <a:latin typeface="Inter Medium"/>
+                <a:ea typeface="+mn-ea"/>
+                <a:cs typeface="+mn-cs"/>
+              </a:rPr>
+              <a:t>Webhook / </a:t>
+            </a:r>
+            <a:r>
+              <a:rPr kumimoji="0" lang="ru-RU" sz="900" b="1" i="0" u="none" strike="noStrike" kern="1200" cap="none" spc="0" normalizeH="0" baseline="0" noProof="0" dirty="0">
+                <a:ln>
+                  <a:noFill/>
+                </a:ln>
+                <a:solidFill>
+                  <a:srgbClr val="0A1650"/>
+                </a:solidFill>
+                <a:effectLst/>
+                <a:uLnTx/>
+                <a:uFillTx/>
+                <a:latin typeface="Inter Medium"/>
+                <a:ea typeface="+mn-ea"/>
+                <a:cs typeface="+mn-cs"/>
+              </a:rPr>
+              <a:t>локальный </a:t>
+            </a:r>
+            <a:r>
+              <a:rPr kumimoji="0" lang="en-US" sz="900" b="1" i="0" u="none" strike="noStrike" kern="1200" cap="none" spc="0" normalizeH="0" baseline="0" noProof="0" dirty="0">
+                <a:ln>
+                  <a:noFill/>
+                </a:ln>
+                <a:solidFill>
+                  <a:srgbClr val="0A1650"/>
+                </a:solidFill>
+                <a:effectLst/>
+                <a:uLnTx/>
+                <a:uFillTx/>
+                <a:latin typeface="Inter Medium"/>
+                <a:ea typeface="+mn-ea"/>
+                <a:cs typeface="+mn-cs"/>
+              </a:rPr>
+              <a:t>polling</a:t>
+            </a:r>
+            <a:endParaRPr kumimoji="0" lang="en-US" sz="1200" b="0" i="0" u="none" strike="noStrike" kern="1200" cap="none" spc="0" normalizeH="0" baseline="0" noProof="0" dirty="0">
+              <a:ln>
+                <a:noFill/>
+              </a:ln>
+              <a:solidFill>
+                <a:prstClr val="black"/>
+              </a:solidFill>
+              <a:effectLst/>
+              <a:uLnTx/>
+              <a:uFillTx/>
               <a:latin typeface="Inter Medium" panose="02000603000000020004" pitchFamily="50" charset="0"/>
               <a:ea typeface="Inter Medium" panose="02000603000000020004" pitchFamily="50" charset="0"/>
               <a:cs typeface="Inter Medium" panose="02000603000000020004" pitchFamily="50" charset="0"/>
@@ -3302,13 +3206,8 @@
                 <a:ea typeface="Inter Medium" panose="02000603000000020004" pitchFamily="50" charset="0"/>
                 <a:cs typeface="Inter Medium" panose="02000603000000020004" pitchFamily="50" charset="0"/>
               </a:rPr>
-              <a:t>Мини-приложение</a:t>
-            </a:r>
-            <a:endParaRPr lang="en-US" sz="1200" dirty="0">
-              <a:latin typeface="Inter Medium" panose="02000603000000020004" pitchFamily="50" charset="0"/>
-              <a:ea typeface="Inter Medium" panose="02000603000000020004" pitchFamily="50" charset="0"/>
-              <a:cs typeface="Inter Medium" panose="02000603000000020004" pitchFamily="50" charset="0"/>
-            </a:endParaRPr>
+              <a:t>Mini App</a:t>
+            </a:r>
           </a:p>
           <a:p>
             <a:pPr marL="0" indent="0" algn="ctr">
@@ -3323,13 +3222,8 @@
                 <a:ea typeface="Inter Medium" panose="02000603000000020004" pitchFamily="50" charset="0"/>
                 <a:cs typeface="Inter Medium" panose="02000603000000020004" pitchFamily="50" charset="0"/>
               </a:rPr>
-              <a:t>(интерфейс)</a:t>
-            </a:r>
-            <a:endParaRPr lang="en-US" sz="1200" dirty="0">
-              <a:latin typeface="Inter Medium" panose="02000603000000020004" pitchFamily="50" charset="0"/>
-              <a:ea typeface="Inter Medium" panose="02000603000000020004" pitchFamily="50" charset="0"/>
-              <a:cs typeface="Inter Medium" panose="02000603000000020004" pitchFamily="50" charset="0"/>
-            </a:endParaRPr>
+              <a:t>React + TypeScript</a:t>
+            </a:r>
           </a:p>
         </p:txBody>
       </p:sp>
@@ -3393,13 +3287,35 @@
                 <a:ea typeface="Inter Medium" panose="02000603000000020004" pitchFamily="50" charset="0"/>
                 <a:cs typeface="Inter Medium" panose="02000603000000020004" pitchFamily="50" charset="0"/>
               </a:rPr>
-              <a:t>Backend / API</a:t>
-            </a:r>
-            <a:endParaRPr lang="en-US" sz="1200" dirty="0">
-              <a:latin typeface="Inter Medium" panose="02000603000000020004" pitchFamily="50" charset="0"/>
-              <a:ea typeface="Inter Medium" panose="02000603000000020004" pitchFamily="50" charset="0"/>
-              <a:cs typeface="Inter Medium" panose="02000603000000020004" pitchFamily="50" charset="0"/>
-            </a:endParaRPr>
+              <a:t>Go REST API</a:t>
+            </a:r>
+          </a:p>
+          <a:p>
+            <a:pPr marL="0" indent="0" algn="ctr">
+              <a:buNone/>
+            </a:pPr>
+            <a:r>
+              <a:rPr lang="en-US" sz="1200" b="1" dirty="0" err="1">
+                <a:solidFill>
+                  <a:srgbClr val="0A1650"/>
+                </a:solidFill>
+                <a:latin typeface="Inter Medium" panose="02000603000000020004" pitchFamily="50" charset="0"/>
+                <a:ea typeface="Inter Medium" panose="02000603000000020004" pitchFamily="50" charset="0"/>
+                <a:cs typeface="Inter Medium" panose="02000603000000020004" pitchFamily="50" charset="0"/>
+              </a:rPr>
+              <a:t>Vercel</a:t>
+            </a:r>
+            <a:r>
+              <a:rPr lang="en-US" sz="1200" b="1" dirty="0">
+                <a:solidFill>
+                  <a:srgbClr val="0A1650"/>
+                </a:solidFill>
+                <a:latin typeface="Inter Medium" panose="02000603000000020004" pitchFamily="50" charset="0"/>
+                <a:ea typeface="Inter Medium" panose="02000603000000020004" pitchFamily="50" charset="0"/>
+                <a:cs typeface="Inter Medium" panose="02000603000000020004" pitchFamily="50" charset="0"/>
+              </a:rPr>
+              <a:t> Function</a:t>
+            </a:r>
           </a:p>
         </p:txBody>
       </p:sp>
@@ -3463,13 +3379,8 @@
                 <a:ea typeface="Inter Medium" panose="02000603000000020004" pitchFamily="50" charset="0"/>
                 <a:cs typeface="Inter Medium" panose="02000603000000020004" pitchFamily="50" charset="0"/>
               </a:rPr>
-              <a:t>OCR-модуль</a:t>
-            </a:r>
-            <a:endParaRPr lang="en-US" sz="1200" dirty="0">
-              <a:latin typeface="Inter Medium" panose="02000603000000020004" pitchFamily="50" charset="0"/>
-              <a:ea typeface="Inter Medium" panose="02000603000000020004" pitchFamily="50" charset="0"/>
-              <a:cs typeface="Inter Medium" panose="02000603000000020004" pitchFamily="50" charset="0"/>
-            </a:endParaRPr>
+              <a:t>OCR API</a:t>
+            </a:r>
           </a:p>
           <a:p>
             <a:pPr marL="0" indent="0" algn="ctr">
@@ -3484,13 +3395,30 @@
                 <a:ea typeface="Inter Medium" panose="02000603000000020004" pitchFamily="50" charset="0"/>
                 <a:cs typeface="Inter Medium" panose="02000603000000020004" pitchFamily="50" charset="0"/>
               </a:rPr>
-              <a:t>(фото → задачи)</a:t>
-            </a:r>
-            <a:endParaRPr lang="en-US" sz="1200" dirty="0">
-              <a:latin typeface="Inter Medium" panose="02000603000000020004" pitchFamily="50" charset="0"/>
-              <a:ea typeface="Inter Medium" panose="02000603000000020004" pitchFamily="50" charset="0"/>
-              <a:cs typeface="Inter Medium" panose="02000603000000020004" pitchFamily="50" charset="0"/>
-            </a:endParaRPr>
+              <a:t>production </a:t>
+            </a:r>
+            <a:r>
+              <a:rPr lang="en-US" sz="1200" b="1" dirty="0" err="1">
+                <a:solidFill>
+                  <a:srgbClr val="0A1650"/>
+                </a:solidFill>
+                <a:latin typeface="Inter Medium" panose="02000603000000020004" pitchFamily="50" charset="0"/>
+                <a:ea typeface="Inter Medium" panose="02000603000000020004" pitchFamily="50" charset="0"/>
+                <a:cs typeface="Inter Medium" panose="02000603000000020004" pitchFamily="50" charset="0"/>
+              </a:rPr>
+              <a:t>Vercel</a:t>
+            </a:r>
+            <a:r>
+              <a:rPr lang="en-US" sz="1200" b="1" dirty="0">
+                <a:solidFill>
+                  <a:srgbClr val="0A1650"/>
+                </a:solidFill>
+                <a:latin typeface="Inter Medium" panose="02000603000000020004" pitchFamily="50" charset="0"/>
+                <a:ea typeface="Inter Medium" panose="02000603000000020004" pitchFamily="50" charset="0"/>
+                <a:cs typeface="Inter Medium" panose="02000603000000020004" pitchFamily="50" charset="0"/>
+              </a:rPr>
+              <a:t>*</a:t>
+            </a:r>
           </a:p>
         </p:txBody>
       </p:sp>
@@ -3554,13 +3482,8 @@
                 <a:ea typeface="Inter Medium" panose="02000603000000020004" pitchFamily="50" charset="0"/>
                 <a:cs typeface="Inter Medium" panose="02000603000000020004" pitchFamily="50" charset="0"/>
               </a:rPr>
-              <a:t>База данных</a:t>
-            </a:r>
-            <a:endParaRPr lang="en-US" sz="1200" dirty="0">
-              <a:latin typeface="Inter Medium" panose="02000603000000020004" pitchFamily="50" charset="0"/>
-              <a:ea typeface="Inter Medium" panose="02000603000000020004" pitchFamily="50" charset="0"/>
-              <a:cs typeface="Inter Medium" panose="02000603000000020004" pitchFamily="50" charset="0"/>
-            </a:endParaRPr>
+              <a:t>SQLite / Turso</a:t>
+            </a:r>
           </a:p>
         </p:txBody>
       </p:sp>
@@ -3616,42 +3539,32 @@
               <a:buNone/>
             </a:pPr>
             <a:r>
-              <a:rPr lang="en-US" sz="1050" b="1" dirty="0">
-                <a:solidFill>
-                  <a:srgbClr val="0A1650"/>
-                </a:solidFill>
-                <a:latin typeface="Inter Medium" panose="02000603000000020004" pitchFamily="50" charset="0"/>
-                <a:ea typeface="Inter Medium" panose="02000603000000020004" pitchFamily="50" charset="0"/>
-                <a:cs typeface="Inter Medium" panose="02000603000000020004" pitchFamily="50" charset="0"/>
-              </a:rPr>
-              <a:t>Логика: Эйзенхауэр,</a:t>
-            </a:r>
-            <a:endParaRPr lang="en-US" sz="1050" dirty="0">
-              <a:latin typeface="Inter Medium" panose="02000603000000020004" pitchFamily="50" charset="0"/>
-              <a:ea typeface="Inter Medium" panose="02000603000000020004" pitchFamily="50" charset="0"/>
-              <a:cs typeface="Inter Medium" panose="02000603000000020004" pitchFamily="50" charset="0"/>
-            </a:endParaRPr>
+              <a:rPr lang="ru-RU" sz="1050" b="1" dirty="0">
+                <a:solidFill>
+                  <a:srgbClr val="0A1650"/>
+                </a:solidFill>
+                <a:latin typeface="Inter Medium" panose="02000603000000020004" pitchFamily="50" charset="0"/>
+                <a:ea typeface="Inter Medium" panose="02000603000000020004" pitchFamily="50" charset="0"/>
+                <a:cs typeface="Inter Medium" panose="02000603000000020004" pitchFamily="50" charset="0"/>
+              </a:rPr>
+              <a:t>Задачи и Эйзенхауэр</a:t>
+            </a:r>
           </a:p>
           <a:p>
             <a:pPr marL="0" indent="0" algn="ctr">
               <a:buNone/>
             </a:pPr>
             <a:r>
-              <a:rPr lang="en-US" sz="1050" b="1" dirty="0">
-                <a:solidFill>
-                  <a:srgbClr val="0A1650"/>
-                </a:solidFill>
-                <a:latin typeface="Inter Medium" panose="02000603000000020004" pitchFamily="50" charset="0"/>
-                <a:ea typeface="Inter Medium" panose="02000603000000020004" pitchFamily="50" charset="0"/>
-                <a:cs typeface="Inter Medium" panose="02000603000000020004" pitchFamily="50" charset="0"/>
-              </a:rPr>
-              <a:t>баланс, рекомендации</a:t>
-            </a:r>
-            <a:endParaRPr lang="en-US" sz="1050" dirty="0">
-              <a:latin typeface="Inter Medium" panose="02000603000000020004" pitchFamily="50" charset="0"/>
-              <a:ea typeface="Inter Medium" panose="02000603000000020004" pitchFamily="50" charset="0"/>
-              <a:cs typeface="Inter Medium" panose="02000603000000020004" pitchFamily="50" charset="0"/>
-            </a:endParaRPr>
+              <a:rPr lang="ru-RU" sz="1050" b="1" dirty="0">
+                <a:solidFill>
+                  <a:srgbClr val="0A1650"/>
+                </a:solidFill>
+                <a:latin typeface="Inter Medium" panose="02000603000000020004" pitchFamily="50" charset="0"/>
+                <a:ea typeface="Inter Medium" panose="02000603000000020004" pitchFamily="50" charset="0"/>
+                <a:cs typeface="Inter Medium" panose="02000603000000020004" pitchFamily="50" charset="0"/>
+              </a:rPr>
+              <a:t>настроение и напоминания</a:t>
+            </a:r>
           </a:p>
         </p:txBody>
       </p:sp>
@@ -3948,101 +3861,95 @@
               <a:buNone/>
             </a:pPr>
             <a:r>
-              <a:rPr lang="en-US" sz="1300" dirty="0">
-                <a:solidFill>
-                  <a:srgbClr val="0A1650"/>
-                </a:solidFill>
-                <a:latin typeface="Inter Medium" panose="02000603000000020004" pitchFamily="50" charset="0"/>
-                <a:ea typeface="Inter Medium" panose="02000603000000020004" pitchFamily="50" charset="0"/>
-                <a:cs typeface="Inter Medium" panose="02000603000000020004" pitchFamily="50" charset="0"/>
-              </a:rPr>
-              <a:t>• Задачи: название, предмет, срок, приоритет</a:t>
-            </a:r>
-            <a:endParaRPr lang="en-US" sz="1500" dirty="0">
-              <a:latin typeface="Inter Medium" panose="02000603000000020004" pitchFamily="50" charset="0"/>
-              <a:ea typeface="Inter Medium" panose="02000603000000020004" pitchFamily="50" charset="0"/>
-              <a:cs typeface="Inter Medium" panose="02000603000000020004" pitchFamily="50" charset="0"/>
-            </a:endParaRPr>
+              <a:rPr lang="ru-RU" sz="1300" dirty="0">
+                <a:solidFill>
+                  <a:srgbClr val="0A1650"/>
+                </a:solidFill>
+                <a:latin typeface="Inter Medium" panose="02000603000000020004" pitchFamily="50" charset="0"/>
+                <a:ea typeface="Inter Medium" panose="02000603000000020004" pitchFamily="50" charset="0"/>
+                <a:cs typeface="Inter Medium" panose="02000603000000020004" pitchFamily="50" charset="0"/>
+              </a:rPr>
+              <a:t>• MAX ID, имя и согласия</a:t>
+            </a:r>
           </a:p>
           <a:p>
             <a:pPr marL="0" indent="0">
               <a:buNone/>
             </a:pPr>
             <a:r>
-              <a:rPr lang="en-US" sz="1300" dirty="0">
-                <a:solidFill>
-                  <a:srgbClr val="0A1650"/>
-                </a:solidFill>
-                <a:latin typeface="Inter Medium" panose="02000603000000020004" pitchFamily="50" charset="0"/>
-                <a:ea typeface="Inter Medium" panose="02000603000000020004" pitchFamily="50" charset="0"/>
-                <a:cs typeface="Inter Medium" panose="02000603000000020004" pitchFamily="50" charset="0"/>
-              </a:rPr>
-              <a:t>• Расписание и календарь</a:t>
-            </a:r>
-            <a:endParaRPr lang="en-US" sz="1500" dirty="0">
-              <a:latin typeface="Inter Medium" panose="02000603000000020004" pitchFamily="50" charset="0"/>
-              <a:ea typeface="Inter Medium" panose="02000603000000020004" pitchFamily="50" charset="0"/>
-              <a:cs typeface="Inter Medium" panose="02000603000000020004" pitchFamily="50" charset="0"/>
-            </a:endParaRPr>
+              <a:rPr lang="ru-RU" sz="1300" dirty="0">
+                <a:solidFill>
+                  <a:srgbClr val="0A1650"/>
+                </a:solidFill>
+                <a:latin typeface="Inter Medium" panose="02000603000000020004" pitchFamily="50" charset="0"/>
+                <a:ea typeface="Inter Medium" panose="02000603000000020004" pitchFamily="50" charset="0"/>
+                <a:cs typeface="Inter Medium" panose="02000603000000020004" pitchFamily="50" charset="0"/>
+              </a:rPr>
+              <a:t>• Задачи, сроки и приоритеты</a:t>
+            </a:r>
           </a:p>
           <a:p>
             <a:pPr marL="0" indent="0">
               <a:buNone/>
             </a:pPr>
             <a:r>
-              <a:rPr lang="en-US" sz="1300" dirty="0">
-                <a:solidFill>
-                  <a:srgbClr val="0A1650"/>
-                </a:solidFill>
-                <a:latin typeface="Inter Medium" panose="02000603000000020004" pitchFamily="50" charset="0"/>
-                <a:ea typeface="Inter Medium" panose="02000603000000020004" pitchFamily="50" charset="0"/>
-                <a:cs typeface="Inter Medium" panose="02000603000000020004" pitchFamily="50" charset="0"/>
-              </a:rPr>
-              <a:t>• Отметки состояния и индикатор баланса</a:t>
-            </a:r>
-            <a:endParaRPr lang="en-US" sz="1500" dirty="0">
-              <a:latin typeface="Inter Medium" panose="02000603000000020004" pitchFamily="50" charset="0"/>
-              <a:ea typeface="Inter Medium" panose="02000603000000020004" pitchFamily="50" charset="0"/>
-              <a:cs typeface="Inter Medium" panose="02000603000000020004" pitchFamily="50" charset="0"/>
-            </a:endParaRPr>
+              <a:rPr lang="ru-RU" sz="1300" dirty="0">
+                <a:solidFill>
+                  <a:srgbClr val="0A1650"/>
+                </a:solidFill>
+                <a:latin typeface="Inter Medium" panose="02000603000000020004" pitchFamily="50" charset="0"/>
+                <a:ea typeface="Inter Medium" panose="02000603000000020004" pitchFamily="50" charset="0"/>
+                <a:cs typeface="Inter Medium" panose="02000603000000020004" pitchFamily="50" charset="0"/>
+              </a:rPr>
+              <a:t>• Отметки настроения и заметки</a:t>
+            </a:r>
           </a:p>
           <a:p>
             <a:pPr marL="0" indent="0">
               <a:buNone/>
             </a:pPr>
             <a:r>
-              <a:rPr lang="en-US" sz="1300" dirty="0">
-                <a:solidFill>
-                  <a:srgbClr val="0A1650"/>
-                </a:solidFill>
-                <a:latin typeface="Inter Medium" panose="02000603000000020004" pitchFamily="50" charset="0"/>
-                <a:ea typeface="Inter Medium" panose="02000603000000020004" pitchFamily="50" charset="0"/>
-                <a:cs typeface="Inter Medium" panose="02000603000000020004" pitchFamily="50" charset="0"/>
-              </a:rPr>
-              <a:t>• Фото расписания (для OCR)</a:t>
-            </a:r>
-            <a:endParaRPr lang="en-US" sz="1500" dirty="0">
-              <a:latin typeface="Inter Medium" panose="02000603000000020004" pitchFamily="50" charset="0"/>
-              <a:ea typeface="Inter Medium" panose="02000603000000020004" pitchFamily="50" charset="0"/>
-              <a:cs typeface="Inter Medium" panose="02000603000000020004" pitchFamily="50" charset="0"/>
-            </a:endParaRPr>
+              <a:rPr lang="ru-RU" sz="1300" dirty="0">
+                <a:solidFill>
+                  <a:srgbClr val="0A1650"/>
+                </a:solidFill>
+                <a:latin typeface="Inter Medium" panose="02000603000000020004" pitchFamily="50" charset="0"/>
+                <a:ea typeface="Inter Medium" panose="02000603000000020004" pitchFamily="50" charset="0"/>
+                <a:cs typeface="Inter Medium" panose="02000603000000020004" pitchFamily="50" charset="0"/>
+              </a:rPr>
+              <a:t>• Фото для OCR; сохранение после проверки</a:t>
+            </a:r>
           </a:p>
           <a:p>
             <a:pPr marL="0" indent="0">
               <a:buNone/>
             </a:pPr>
             <a:r>
-              <a:rPr lang="en-US" sz="1300" dirty="0">
-                <a:solidFill>
-                  <a:srgbClr val="0A1650"/>
-                </a:solidFill>
-                <a:latin typeface="Inter Medium" panose="02000603000000020004" pitchFamily="50" charset="0"/>
-                <a:ea typeface="Inter Medium" panose="02000603000000020004" pitchFamily="50" charset="0"/>
-                <a:cs typeface="Inter Medium" panose="02000603000000020004" pitchFamily="50" charset="0"/>
-              </a:rPr>
-              <a:t>• Группы и общие задачи</a:t>
-            </a:r>
-            <a:endParaRPr lang="en-US" sz="1500" dirty="0">
+              <a:rPr lang="ru-RU" sz="1300" dirty="0">
+                <a:solidFill>
+                  <a:srgbClr val="0A1650"/>
+                </a:solidFill>
+                <a:latin typeface="Inter Medium" panose="02000603000000020004" pitchFamily="50" charset="0"/>
+                <a:ea typeface="Inter Medium" panose="02000603000000020004" pitchFamily="50" charset="0"/>
+                <a:cs typeface="Inter Medium" panose="02000603000000020004" pitchFamily="50" charset="0"/>
+              </a:rPr>
+              <a:t>• Групповые задачи — только после </a:t>
+            </a:r>
+            <a:r>
+              <a:rPr lang="ru-RU" sz="1300" dirty="0" err="1">
+                <a:solidFill>
+                  <a:srgbClr val="0A1650"/>
+                </a:solidFill>
+                <a:latin typeface="Inter Medium" panose="02000603000000020004" pitchFamily="50" charset="0"/>
+                <a:ea typeface="Inter Medium" panose="02000603000000020004" pitchFamily="50" charset="0"/>
+                <a:cs typeface="Inter Medium" panose="02000603000000020004" pitchFamily="50" charset="0"/>
+              </a:rPr>
+              <a:t>opt-in</a:t>
+            </a:r>
+            <a:endParaRPr lang="ru-RU" sz="1300" dirty="0">
+              <a:solidFill>
+                <a:srgbClr val="0A1650"/>
+              </a:solidFill>
               <a:latin typeface="Inter Medium" panose="02000603000000020004" pitchFamily="50" charset="0"/>
               <a:ea typeface="Inter Medium" panose="02000603000000020004" pitchFamily="50" charset="0"/>
               <a:cs typeface="Inter Medium" panose="02000603000000020004" pitchFamily="50" charset="0"/>
@@ -4134,9 +4041,42 @@
                 <a:ea typeface="Inter Medium" panose="02000603000000020004" pitchFamily="50" charset="0"/>
                 <a:cs typeface="Inter Medium" panose="02000603000000020004" pitchFamily="50" charset="0"/>
               </a:rPr>
-              <a:t>• MAX: авторизация, чат-бот, мини-приложение</a:t>
-            </a:r>
-            <a:endParaRPr lang="en-US" sz="1500" dirty="0">
+              <a:t>• MAX Bot API </a:t>
+            </a:r>
+            <a:r>
+              <a:rPr lang="ru-RU" sz="1300" dirty="0">
+                <a:solidFill>
+                  <a:srgbClr val="426CC2"/>
+                </a:solidFill>
+                <a:latin typeface="Inter Medium" panose="02000603000000020004" pitchFamily="50" charset="0"/>
+                <a:ea typeface="Inter Medium" panose="02000603000000020004" pitchFamily="50" charset="0"/>
+                <a:cs typeface="Inter Medium" panose="02000603000000020004" pitchFamily="50" charset="0"/>
+              </a:rPr>
+              <a:t>и </a:t>
+            </a:r>
+            <a:r>
+              <a:rPr lang="en-US" sz="1300" dirty="0">
+                <a:solidFill>
+                  <a:srgbClr val="426CC2"/>
+                </a:solidFill>
+                <a:latin typeface="Inter Medium" panose="02000603000000020004" pitchFamily="50" charset="0"/>
+                <a:ea typeface="Inter Medium" panose="02000603000000020004" pitchFamily="50" charset="0"/>
+                <a:cs typeface="Inter Medium" panose="02000603000000020004" pitchFamily="50" charset="0"/>
+              </a:rPr>
+              <a:t>Mini App </a:t>
+            </a:r>
+            <a:r>
+              <a:rPr lang="en-US" sz="1300" dirty="0" err="1">
+                <a:solidFill>
+                  <a:srgbClr val="426CC2"/>
+                </a:solidFill>
+                <a:latin typeface="Inter Medium" panose="02000603000000020004" pitchFamily="50" charset="0"/>
+                <a:ea typeface="Inter Medium" panose="02000603000000020004" pitchFamily="50" charset="0"/>
+                <a:cs typeface="Inter Medium" panose="02000603000000020004" pitchFamily="50" charset="0"/>
+              </a:rPr>
+              <a:t>initData</a:t>
+            </a:r>
+            <a:endParaRPr lang="en-US" sz="1300" dirty="0">
               <a:solidFill>
                 <a:srgbClr val="426CC2"/>
               </a:solidFill>
@@ -4158,9 +4098,53 @@
                 <a:ea typeface="Inter Medium" panose="02000603000000020004" pitchFamily="50" charset="0"/>
                 <a:cs typeface="Inter Medium" panose="02000603000000020004" pitchFamily="50" charset="0"/>
               </a:rPr>
-              <a:t>• OCR: распознавание расписания по фото</a:t>
-            </a:r>
-            <a:endParaRPr lang="en-US" sz="1500" dirty="0">
+              <a:t>• Go API, webhook </a:t>
+            </a:r>
+            <a:r>
+              <a:rPr lang="ru-RU" sz="1300" dirty="0">
+                <a:solidFill>
+                  <a:srgbClr val="426CC2"/>
+                </a:solidFill>
+                <a:latin typeface="Inter Medium" panose="02000603000000020004" pitchFamily="50" charset="0"/>
+                <a:ea typeface="Inter Medium" panose="02000603000000020004" pitchFamily="50" charset="0"/>
+                <a:cs typeface="Inter Medium" panose="02000603000000020004" pitchFamily="50" charset="0"/>
+              </a:rPr>
+              <a:t>и </a:t>
+            </a:r>
+            <a:r>
+              <a:rPr lang="en-US" sz="1300" dirty="0">
+                <a:solidFill>
+                  <a:srgbClr val="426CC2"/>
+                </a:solidFill>
+                <a:latin typeface="Inter Medium" panose="02000603000000020004" pitchFamily="50" charset="0"/>
+                <a:ea typeface="Inter Medium" panose="02000603000000020004" pitchFamily="50" charset="0"/>
+                <a:cs typeface="Inter Medium" panose="02000603000000020004" pitchFamily="50" charset="0"/>
+              </a:rPr>
+              <a:t>Cron </a:t>
+            </a:r>
+            <a:r>
+              <a:rPr lang="ru-RU" sz="1300" dirty="0">
+                <a:solidFill>
+                  <a:srgbClr val="426CC2"/>
+                </a:solidFill>
+                <a:latin typeface="Inter Medium" panose="02000603000000020004" pitchFamily="50" charset="0"/>
+                <a:ea typeface="Inter Medium" panose="02000603000000020004" pitchFamily="50" charset="0"/>
+                <a:cs typeface="Inter Medium" panose="02000603000000020004" pitchFamily="50" charset="0"/>
+              </a:rPr>
+              <a:t>в </a:t>
+            </a:r>
+            <a:r>
+              <a:rPr lang="en-US" sz="1300" dirty="0" err="1">
+                <a:solidFill>
+                  <a:srgbClr val="426CC2"/>
+                </a:solidFill>
+                <a:latin typeface="Inter Medium" panose="02000603000000020004" pitchFamily="50" charset="0"/>
+                <a:ea typeface="Inter Medium" panose="02000603000000020004" pitchFamily="50" charset="0"/>
+                <a:cs typeface="Inter Medium" panose="02000603000000020004" pitchFamily="50" charset="0"/>
+              </a:rPr>
+              <a:t>Vercel</a:t>
+            </a:r>
+            <a:endParaRPr lang="en-US" sz="1300" dirty="0">
               <a:solidFill>
                 <a:srgbClr val="426CC2"/>
               </a:solidFill>
@@ -4182,16 +4166,183 @@
                 <a:ea typeface="Inter Medium" panose="02000603000000020004" pitchFamily="50" charset="0"/>
                 <a:cs typeface="Inter Medium" panose="02000603000000020004" pitchFamily="50" charset="0"/>
               </a:rPr>
-              <a:t>• Политика конфиденциальности: только данные, нужные для работы приложения</a:t>
-            </a:r>
-            <a:endParaRPr lang="en-US" sz="1500" dirty="0">
-              <a:solidFill>
-                <a:srgbClr val="426CC2"/>
-              </a:solidFill>
-              <a:latin typeface="Inter Medium" panose="02000603000000020004" pitchFamily="50" charset="0"/>
-              <a:ea typeface="Inter Medium" panose="02000603000000020004" pitchFamily="50" charset="0"/>
-              <a:cs typeface="Inter Medium" panose="02000603000000020004" pitchFamily="50" charset="0"/>
-            </a:endParaRPr>
+              <a:t>• OCR API </a:t>
+            </a:r>
+            <a:r>
+              <a:rPr lang="ru-RU" sz="1300" dirty="0">
+                <a:solidFill>
+                  <a:srgbClr val="426CC2"/>
+                </a:solidFill>
+                <a:latin typeface="Inter Medium" panose="02000603000000020004" pitchFamily="50" charset="0"/>
+                <a:ea typeface="Inter Medium" panose="02000603000000020004" pitchFamily="50" charset="0"/>
+                <a:cs typeface="Inter Medium" panose="02000603000000020004" pitchFamily="50" charset="0"/>
+              </a:rPr>
+              <a:t>в </a:t>
+            </a:r>
+            <a:r>
+              <a:rPr lang="en-US" sz="1300" dirty="0">
+                <a:solidFill>
+                  <a:srgbClr val="426CC2"/>
+                </a:solidFill>
+                <a:latin typeface="Inter Medium" panose="02000603000000020004" pitchFamily="50" charset="0"/>
+                <a:ea typeface="Inter Medium" panose="02000603000000020004" pitchFamily="50" charset="0"/>
+                <a:cs typeface="Inter Medium" panose="02000603000000020004" pitchFamily="50" charset="0"/>
+              </a:rPr>
+              <a:t>production </a:t>
+            </a:r>
+            <a:r>
+              <a:rPr lang="en-US" sz="1300" dirty="0" err="1">
+                <a:solidFill>
+                  <a:srgbClr val="426CC2"/>
+                </a:solidFill>
+                <a:latin typeface="Inter Medium" panose="02000603000000020004" pitchFamily="50" charset="0"/>
+                <a:ea typeface="Inter Medium" panose="02000603000000020004" pitchFamily="50" charset="0"/>
+                <a:cs typeface="Inter Medium" panose="02000603000000020004" pitchFamily="50" charset="0"/>
+              </a:rPr>
+              <a:t>Vercel</a:t>
+            </a:r>
+            <a:r>
+              <a:rPr lang="en-US" sz="1300" dirty="0">
+                <a:solidFill>
+                  <a:srgbClr val="426CC2"/>
+                </a:solidFill>
+                <a:latin typeface="Inter Medium" panose="02000603000000020004" pitchFamily="50" charset="0"/>
+                <a:ea typeface="Inter Medium" panose="02000603000000020004" pitchFamily="50" charset="0"/>
+                <a:cs typeface="Inter Medium" panose="02000603000000020004" pitchFamily="50" charset="0"/>
+              </a:rPr>
+              <a:t> (</a:t>
+            </a:r>
+            <a:r>
+              <a:rPr lang="ru-RU" sz="1300" dirty="0">
+                <a:solidFill>
+                  <a:srgbClr val="426CC2"/>
+                </a:solidFill>
+                <a:latin typeface="Inter Medium" panose="02000603000000020004" pitchFamily="50" charset="0"/>
+                <a:ea typeface="Inter Medium" panose="02000603000000020004" pitchFamily="50" charset="0"/>
+                <a:cs typeface="Inter Medium" panose="02000603000000020004" pitchFamily="50" charset="0"/>
+              </a:rPr>
+              <a:t>по настройке команды)</a:t>
+            </a:r>
+          </a:p>
+          <a:p>
+            <a:pPr marL="0" indent="0">
+              <a:buNone/>
+            </a:pPr>
+            <a:r>
+              <a:rPr lang="ru-RU" sz="1300" dirty="0">
+                <a:solidFill>
+                  <a:srgbClr val="426CC2"/>
+                </a:solidFill>
+                <a:latin typeface="Inter Medium" panose="02000603000000020004" pitchFamily="50" charset="0"/>
+                <a:ea typeface="Inter Medium" panose="02000603000000020004" pitchFamily="50" charset="0"/>
+                <a:cs typeface="Inter Medium" panose="02000603000000020004" pitchFamily="50" charset="0"/>
+              </a:rPr>
+              <a:t>• </a:t>
+            </a:r>
+            <a:r>
+              <a:rPr lang="en-US" sz="1300" dirty="0">
+                <a:solidFill>
+                  <a:srgbClr val="426CC2"/>
+                </a:solidFill>
+                <a:latin typeface="Inter Medium" panose="02000603000000020004" pitchFamily="50" charset="0"/>
+                <a:ea typeface="Inter Medium" panose="02000603000000020004" pitchFamily="50" charset="0"/>
+                <a:cs typeface="Inter Medium" panose="02000603000000020004" pitchFamily="50" charset="0"/>
+              </a:rPr>
+              <a:t>SQLite </a:t>
+            </a:r>
+            <a:r>
+              <a:rPr lang="ru-RU" sz="1300" dirty="0">
+                <a:solidFill>
+                  <a:srgbClr val="426CC2"/>
+                </a:solidFill>
+                <a:latin typeface="Inter Medium" panose="02000603000000020004" pitchFamily="50" charset="0"/>
+                <a:ea typeface="Inter Medium" panose="02000603000000020004" pitchFamily="50" charset="0"/>
+                <a:cs typeface="Inter Medium" panose="02000603000000020004" pitchFamily="50" charset="0"/>
+              </a:rPr>
+              <a:t>локально; </a:t>
+            </a:r>
+            <a:r>
+              <a:rPr lang="en-US" sz="1300" dirty="0">
+                <a:solidFill>
+                  <a:srgbClr val="426CC2"/>
+                </a:solidFill>
+                <a:latin typeface="Inter Medium" panose="02000603000000020004" pitchFamily="50" charset="0"/>
+                <a:ea typeface="Inter Medium" panose="02000603000000020004" pitchFamily="50" charset="0"/>
+                <a:cs typeface="Inter Medium" panose="02000603000000020004" pitchFamily="50" charset="0"/>
+              </a:rPr>
+              <a:t>Turso </a:t>
+            </a:r>
+            <a:r>
+              <a:rPr lang="ru-RU" sz="1300" dirty="0">
+                <a:solidFill>
+                  <a:srgbClr val="426CC2"/>
+                </a:solidFill>
+                <a:latin typeface="Inter Medium" panose="02000603000000020004" pitchFamily="50" charset="0"/>
+                <a:ea typeface="Inter Medium" panose="02000603000000020004" pitchFamily="50" charset="0"/>
+                <a:cs typeface="Inter Medium" panose="02000603000000020004" pitchFamily="50" charset="0"/>
+              </a:rPr>
+              <a:t>при заданных </a:t>
+            </a:r>
+            <a:r>
+              <a:rPr lang="en-US" sz="1300" dirty="0">
+                <a:solidFill>
+                  <a:srgbClr val="426CC2"/>
+                </a:solidFill>
+                <a:latin typeface="Inter Medium" panose="02000603000000020004" pitchFamily="50" charset="0"/>
+                <a:ea typeface="Inter Medium" panose="02000603000000020004" pitchFamily="50" charset="0"/>
+                <a:cs typeface="Inter Medium" panose="02000603000000020004" pitchFamily="50" charset="0"/>
+              </a:rPr>
+              <a:t>credentials</a:t>
+            </a:r>
+          </a:p>
+          <a:p>
+            <a:pPr marL="0" indent="0">
+              <a:buNone/>
+            </a:pPr>
+            <a:r>
+              <a:rPr lang="en-US" sz="1300" dirty="0">
+                <a:solidFill>
+                  <a:srgbClr val="426CC2"/>
+                </a:solidFill>
+                <a:latin typeface="Inter Medium" panose="02000603000000020004" pitchFamily="50" charset="0"/>
+                <a:ea typeface="Inter Medium" panose="02000603000000020004" pitchFamily="50" charset="0"/>
+                <a:cs typeface="Inter Medium" panose="02000603000000020004" pitchFamily="50" charset="0"/>
+              </a:rPr>
+              <a:t>• Yandex </a:t>
+            </a:r>
+            <a:r>
+              <a:rPr lang="en-US" sz="1300" dirty="0" err="1">
+                <a:solidFill>
+                  <a:srgbClr val="426CC2"/>
+                </a:solidFill>
+                <a:latin typeface="Inter Medium" panose="02000603000000020004" pitchFamily="50" charset="0"/>
+                <a:ea typeface="Inter Medium" panose="02000603000000020004" pitchFamily="50" charset="0"/>
+                <a:cs typeface="Inter Medium" panose="02000603000000020004" pitchFamily="50" charset="0"/>
+              </a:rPr>
+              <a:t>SpeechKit</a:t>
+            </a:r>
+            <a:r>
+              <a:rPr lang="en-US" sz="1300" dirty="0">
+                <a:solidFill>
+                  <a:srgbClr val="426CC2"/>
+                </a:solidFill>
+                <a:latin typeface="Inter Medium" panose="02000603000000020004" pitchFamily="50" charset="0"/>
+                <a:ea typeface="Inter Medium" panose="02000603000000020004" pitchFamily="50" charset="0"/>
+                <a:cs typeface="Inter Medium" panose="02000603000000020004" pitchFamily="50" charset="0"/>
+              </a:rPr>
+              <a:t> — </a:t>
+            </a:r>
+            <a:r>
+              <a:rPr lang="ru-RU" sz="1300" dirty="0">
+                <a:solidFill>
+                  <a:srgbClr val="426CC2"/>
+                </a:solidFill>
+                <a:latin typeface="Inter Medium" panose="02000603000000020004" pitchFamily="50" charset="0"/>
+                <a:ea typeface="Inter Medium" panose="02000603000000020004" pitchFamily="50" charset="0"/>
+                <a:cs typeface="Inter Medium" panose="02000603000000020004" pitchFamily="50" charset="0"/>
+              </a:rPr>
+              <a:t>опционально для голоса</a:t>
+            </a:r>
           </a:p>
         </p:txBody>
       </p:sp>
@@ -4344,60 +4495,22 @@
               <a:buNone/>
             </a:pPr>
             <a:r>
-              <a:rPr lang="en-US" sz="1200" dirty="0">
-                <a:solidFill>
-                  <a:srgbClr val="0A1650"/>
-                </a:solidFill>
-                <a:latin typeface="Inter Medium" panose="02000603000000020004" pitchFamily="50" charset="0"/>
-                <a:ea typeface="Inter Medium" panose="02000603000000020004" pitchFamily="50" charset="0"/>
-                <a:cs typeface="Inter Medium" panose="02000603000000020004" pitchFamily="50" charset="0"/>
-              </a:rPr>
-              <a:t>• Пока только первокурсники</a:t>
-            </a:r>
-            <a:endParaRPr lang="en-US" sz="1400" dirty="0">
-              <a:latin typeface="Inter Medium" panose="02000603000000020004" pitchFamily="50" charset="0"/>
-              <a:ea typeface="Inter Medium" panose="02000603000000020004" pitchFamily="50" charset="0"/>
-              <a:cs typeface="Inter Medium" panose="02000603000000020004" pitchFamily="50" charset="0"/>
-            </a:endParaRPr>
+              <a:rPr lang="ru-RU" sz="1200" dirty="0">
+                <a:solidFill>
+                  <a:srgbClr val="0A1650"/>
+                </a:solidFill>
+                <a:latin typeface="Inter Medium" panose="02000603000000020004" pitchFamily="50" charset="0"/>
+                <a:ea typeface="Inter Medium" panose="02000603000000020004" pitchFamily="50" charset="0"/>
+                <a:cs typeface="Inter Medium" panose="02000603000000020004" pitchFamily="50" charset="0"/>
+              </a:rPr>
+              <a:t>• Пилот ориентирован на первокурсников</a:t>
+            </a:r>
           </a:p>
           <a:p>
             <a:pPr marL="0" indent="0">
               <a:buNone/>
             </a:pPr>
             <a:r>
-              <a:rPr lang="en-US" sz="1200" dirty="0">
-                <a:solidFill>
-                  <a:srgbClr val="0A1650"/>
-                </a:solidFill>
-                <a:latin typeface="Inter Medium" panose="02000603000000020004" pitchFamily="50" charset="0"/>
-                <a:ea typeface="Inter Medium" panose="02000603000000020004" pitchFamily="50" charset="0"/>
-                <a:cs typeface="Inter Medium" panose="02000603000000020004" pitchFamily="50" charset="0"/>
-              </a:rPr>
-              <a:t>• Не заменяет психолога: при </a:t>
-            </a:r>
-            <a:r>
-              <a:rPr lang="en-US" sz="1200" dirty="0" err="1">
-                <a:solidFill>
-                  <a:srgbClr val="0A1650"/>
-                </a:solidFill>
-                <a:latin typeface="Inter Medium" panose="02000603000000020004" pitchFamily="50" charset="0"/>
-                <a:ea typeface="Inter Medium" panose="02000603000000020004" pitchFamily="50" charset="0"/>
-                <a:cs typeface="Inter Medium" panose="02000603000000020004" pitchFamily="50" charset="0"/>
-              </a:rPr>
-              <a:t>необходимости</a:t>
-            </a:r>
-            <a:r>
-              <a:rPr lang="en-US" sz="1200" dirty="0">
-                <a:solidFill>
-                  <a:srgbClr val="0A1650"/>
-                </a:solidFill>
-                <a:latin typeface="Inter Medium" panose="02000603000000020004" pitchFamily="50" charset="0"/>
-                <a:ea typeface="Inter Medium" panose="02000603000000020004" pitchFamily="50" charset="0"/>
-                <a:cs typeface="Inter Medium" panose="02000603000000020004" pitchFamily="50" charset="0"/>
-              </a:rPr>
-              <a:t> </a:t>
-            </a:r>
-            <a:r>
               <a:rPr lang="ru-RU" sz="1200" dirty="0">
                 <a:solidFill>
                   <a:srgbClr val="0A1650"/>
@@ -4406,24 +4519,46 @@
                 <a:ea typeface="Inter Medium" panose="02000603000000020004" pitchFamily="50" charset="0"/>
                 <a:cs typeface="Inter Medium" panose="02000603000000020004" pitchFamily="50" charset="0"/>
               </a:rPr>
-              <a:t>-</a:t>
-            </a:r>
-            <a:r>
-              <a:rPr lang="en-US" sz="1200" dirty="0">
-                <a:solidFill>
-                  <a:srgbClr val="0A1650"/>
-                </a:solidFill>
-                <a:latin typeface="Inter Medium" panose="02000603000000020004" pitchFamily="50" charset="0"/>
-                <a:ea typeface="Inter Medium" panose="02000603000000020004" pitchFamily="50" charset="0"/>
-                <a:cs typeface="Inter Medium" panose="02000603000000020004" pitchFamily="50" charset="0"/>
-              </a:rPr>
-              <a:t> ссылка на специалиста</a:t>
-            </a:r>
-            <a:endParaRPr lang="en-US" sz="1400" dirty="0">
-              <a:latin typeface="Inter Medium" panose="02000603000000020004" pitchFamily="50" charset="0"/>
-              <a:ea typeface="Inter Medium" panose="02000603000000020004" pitchFamily="50" charset="0"/>
-              <a:cs typeface="Inter Medium" panose="02000603000000020004" pitchFamily="50" charset="0"/>
-            </a:endParaRPr>
+              <a:t>• Подсказки статические, не заменяют психолога</a:t>
+            </a:r>
+          </a:p>
+          <a:p>
+            <a:pPr marL="0" indent="0">
+              <a:buNone/>
+            </a:pPr>
+            <a:r>
+              <a:rPr lang="ru-RU" sz="1200" dirty="0">
+                <a:solidFill>
+                  <a:srgbClr val="0A1650"/>
+                </a:solidFill>
+                <a:latin typeface="Inter Medium" panose="02000603000000020004" pitchFamily="50" charset="0"/>
+                <a:ea typeface="Inter Medium" panose="02000603000000020004" pitchFamily="50" charset="0"/>
+                <a:cs typeface="Inter Medium" panose="02000603000000020004" pitchFamily="50" charset="0"/>
+              </a:rPr>
+              <a:t>• Репозиторий отстаёт от заявленного </a:t>
+            </a:r>
+            <a:r>
+              <a:rPr lang="ru-RU" sz="1200" dirty="0" err="1">
+                <a:solidFill>
+                  <a:srgbClr val="0A1650"/>
+                </a:solidFill>
+                <a:latin typeface="Inter Medium" panose="02000603000000020004" pitchFamily="50" charset="0"/>
+                <a:ea typeface="Inter Medium" panose="02000603000000020004" pitchFamily="50" charset="0"/>
+                <a:cs typeface="Inter Medium" panose="02000603000000020004" pitchFamily="50" charset="0"/>
+              </a:rPr>
+              <a:t>production</a:t>
+            </a:r>
+            <a:r>
+              <a:rPr lang="ru-RU" sz="1200" dirty="0">
+                <a:solidFill>
+                  <a:srgbClr val="0A1650"/>
+                </a:solidFill>
+                <a:latin typeface="Inter Medium" panose="02000603000000020004" pitchFamily="50" charset="0"/>
+                <a:ea typeface="Inter Medium" panose="02000603000000020004" pitchFamily="50" charset="0"/>
+                <a:cs typeface="Inter Medium" panose="02000603000000020004" pitchFamily="50" charset="0"/>
+              </a:rPr>
+              <a:t> OCR: синхронизировать обработчик перед сдачей</a:t>
+            </a:r>
           </a:p>
         </p:txBody>
       </p:sp>
@@ -7366,7 +7501,7 @@
         </p:nvGraphicFramePr>
         <p:xfrm>
           <a:off x="457200" y="1280160"/>
-          <a:ext cx="8229600" cy="1905000"/>
+          <a:ext cx="8229600" cy="1264920"/>
         </p:xfrm>
         <a:graphic>
           <a:graphicData uri="http://schemas.openxmlformats.org/drawingml/2006/table">

--- a/Хакатон_Кибермыши (2).pptx
+++ b/Хакатон_Кибермыши (2).pptx
@@ -1770,7 +1770,7 @@
         <p:spPr bwMode="auto">
           <a:xfrm>
             <a:off x="388620" y="1271417"/>
-            <a:ext cx="2534668" cy="523220"/>
+            <a:ext cx="2512226" cy="523220"/>
           </a:xfrm>
           <a:prstGeom prst="rect">
             <a:avLst/>
@@ -1910,7 +1910,18 @@
                 <a:ea typeface="Inter Medium" panose="02000603000000020004" pitchFamily="50" charset="0"/>
                 <a:cs typeface="Inter Medium" panose="02000603000000020004" pitchFamily="50" charset="0"/>
               </a:rPr>
-              <a:t>76a9620*</a:t>
+              <a:t>31324f5</a:t>
+            </a:r>
+            <a:r>
+              <a:rPr lang="ru-RU" sz="1000" dirty="0">
+                <a:solidFill>
+                  <a:srgbClr val="0A1650"/>
+                </a:solidFill>
+                <a:latin typeface="Inter Medium" panose="02000603000000020004" pitchFamily="50" charset="0"/>
+                <a:ea typeface="Inter Medium" panose="02000603000000020004" pitchFamily="50" charset="0"/>
+                <a:cs typeface="Inter Medium" panose="02000603000000020004" pitchFamily="50" charset="0"/>
+              </a:rPr>
+              <a:t>*</a:t>
             </a:r>
             <a:endParaRPr kumimoji="0" lang="ru-RU" altLang="ru-RU" sz="1000" b="0" i="0" u="none" strike="noStrike" cap="none" normalizeH="0" baseline="0" dirty="0">
               <a:ln>
